--- a/docs/presentation/en/one-pager-en.pptx
+++ b/docs/presentation/en/one-pager-en.pptx
@@ -3204,7 +3204,7 @@
                 </a:solidFill>
                 <a:latin typeface="Calibri"/>
               </a:rPr>
-              <a:t>Local-first search over BSL business logic and configuration metadata  ·  Sergey Matyukhin  ·  Defence, 3 November 2026</a:t>
+              <a:t>Local-first search over BSL business logic and configuration metadata  ·  Sergey Matyukhin</a:t>
             </a:r>
           </a:p>
         </p:txBody>

--- a/docs/presentation/en/one-pager-en.pptx
+++ b/docs/presentation/en/one-pager-en.pptx
@@ -4465,8 +4465,9 @@
                 </a:solidFill>
                 <a:latin typeface="Calibri"/>
               </a:rPr>
-              <a:t>Paired test, vector vs hybrid: Δ nDCG@10 = +0.037, bootstrap 95% CI [-0.015; +0.086], p = 0.154 → NOT statistically significant. The default is unchanged; ADR 0009 is proposed.
-2×2 ablation (nDCG@10, vector/hybrid): old export · symbolic 0.176/0.209; old export · procedural not measurable (dump gone); current export · symbolic 0.165/0.205; current export · procedural 0.339/0.301. Chunking explains the leader flip; the export effect at symbolic chunking is −0.012/−0.004, inside run noise. Interaction cell missing, additivity assumed. The cross-encoder stays an option only (0.117).</a:t>
+              <a:t>Paired test (v2): Δ nDCG@10 = +0.037, bootstrap 95% CI [-0.015; +0.086], p = 0.154 → NOT significant; default unchanged, ADR 0009 proposed.
+Independent v3 hold-out (71 code queries, 3 runs): vector 0.205 ± 0.014 vs hybrid 0.183 ± 0.005 nDCG@10; Δ +0.023, CI [-0.019; +0.061], p = 0.275 → also NOT significant.
+Router on v3: 58/100; the main gap is lexical→hybrid. Lexical anchors: 10/10 in top-3. Cross-encoder stays optional (0.117).</a:t>
             </a:r>
           </a:p>
         </p:txBody>
@@ -4590,7 +4591,7 @@
                 </a:solidFill>
                 <a:latin typeface="Calibri"/>
               </a:rPr>
-              <a:t>•  72 unit tests; ruff clean, mypy over 22 modules, cyclomatic-complexity gate 143 blocks / avg 4.37 (A) in CI; Python 3.11/3.12; CI green at 7b50775.</a:t>
+              <a:t>•  72 unit tests; ruff clean, mypy over 22 modules, cyclomatic-complexity gate 143 blocks / avg 4.37 (A) in CI; Python 3.11/3.12; CI green at 64a0085 (cleaned history).</a:t>
             </a:r>
           </a:p>
           <a:p>
@@ -4609,7 +4610,7 @@
                 </a:solidFill>
                 <a:latin typeface="Calibri"/>
               </a:rPr>
-              <a:t>•  ADR log 0001-0009 and CHANGELOG; router 68/68 on the dev set (blind 75% before patches, 20/20 after — that set is dev now, so a new hold-out is needed).</a:t>
+              <a:t>•  ADR log 0001-0009 and CHANGELOG; router 68/68 on the dev set, 58/100 on the independent v3 hold-out (quoted-name lexical cases fall back to hybrid).</a:t>
             </a:r>
           </a:p>
           <a:p>
@@ -4788,7 +4789,7 @@
                 </a:solidFill>
                 <a:latin typeface="Calibri"/>
               </a:rPr>
-              <a:t>All numbers come from the repository evaluation reports (code_proc / gold-set v2, 4 runs).</a:t>
+              <a:t>All numbers come from the repository reports: gold-set v2 (4 runs) and independent v3 hold-out (3 runs).</a:t>
             </a:r>
           </a:p>
         </p:txBody>

--- a/docs/presentation/en/one-pager-en.pptx
+++ b/docs/presentation/en/one-pager-en.pptx
@@ -3806,7 +3806,7 @@
         </p:nvGraphicFramePr>
         <p:xfrm>
           <a:off x="457200" y="5797296"/>
-          <a:ext cx="6647685" cy="1024128"/>
+          <a:ext cx="6647685" cy="1325880"/>
         </p:xfrm>
         <a:graphic>
           <a:graphicData uri="http://schemas.openxmlformats.org/drawingml/2006/table">
@@ -3821,7 +3821,7 @@
                 <a:gridCol w="1165058"/>
                 <a:gridCol w="1165058"/>
               </a:tblGrid>
-              <a:tr h="204825">
+              <a:tr h="220980">
                 <a:tc>
                   <a:txBody>
                     <a:bodyPr lIns="54864" rIns="45720" tIns="9144" bIns="9144"/>
@@ -3829,7 +3829,7 @@
                     <a:p>
                       <a:pPr algn="l"/>
                       <a:r>
-                        <a:rPr sz="840" b="1">
+                        <a:rPr sz="800" b="1">
                           <a:solidFill>
                             <a:srgbClr val="FFFFFF"/>
                           </a:solidFill>
@@ -3852,7 +3852,7 @@
                     <a:p>
                       <a:pPr algn="r"/>
                       <a:r>
-                        <a:rPr sz="840" b="1">
+                        <a:rPr sz="800" b="1">
                           <a:solidFill>
                             <a:srgbClr val="FFFFFF"/>
                           </a:solidFill>
@@ -3875,7 +3875,7 @@
                     <a:p>
                       <a:pPr algn="r"/>
                       <a:r>
-                        <a:rPr sz="840" b="1">
+                        <a:rPr sz="800" b="1">
                           <a:solidFill>
                             <a:srgbClr val="FFFFFF"/>
                           </a:solidFill>
@@ -3898,7 +3898,7 @@
                     <a:p>
                       <a:pPr algn="r"/>
                       <a:r>
-                        <a:rPr sz="840" b="1">
+                        <a:rPr sz="800" b="1">
                           <a:solidFill>
                             <a:srgbClr val="FFFFFF"/>
                           </a:solidFill>
@@ -3921,7 +3921,7 @@
                     <a:p>
                       <a:pPr algn="r"/>
                       <a:r>
-                        <a:rPr sz="840" b="1">
+                        <a:rPr sz="800" b="1">
                           <a:solidFill>
                             <a:srgbClr val="FFFFFF"/>
                           </a:solidFill>
@@ -3938,7 +3938,7 @@
                   </a:tcPr>
                 </a:tc>
               </a:tr>
-              <a:tr h="204825">
+              <a:tr h="220980">
                 <a:tc>
                   <a:txBody>
                     <a:bodyPr lIns="54864" rIns="45720" tIns="9144" bIns="9144"/>
@@ -3946,7 +3946,7 @@
                     <a:p>
                       <a:pPr algn="l"/>
                       <a:r>
-                        <a:rPr sz="840" b="0">
+                        <a:rPr sz="800" b="0">
                           <a:solidFill>
                             <a:srgbClr val="1F2A33"/>
                           </a:solidFill>
@@ -3969,13 +3969,13 @@
                     <a:p>
                       <a:pPr algn="r"/>
                       <a:r>
-                        <a:rPr sz="840" b="0">
+                        <a:rPr sz="800" b="0">
                           <a:solidFill>
                             <a:srgbClr val="1F2A33"/>
                           </a:solidFill>
                           <a:latin typeface="Calibri"/>
                         </a:rPr>
-                        <a:t>0.339 ± 0.023</a:t>
+                        <a:t>0.331 ± 0.028</a:t>
                       </a:r>
                     </a:p>
                   </a:txBody>
@@ -3992,13 +3992,13 @@
                     <a:p>
                       <a:pPr algn="r"/>
                       <a:r>
-                        <a:rPr sz="840" b="0">
+                        <a:rPr sz="800" b="0">
                           <a:solidFill>
                             <a:srgbClr val="1F2A33"/>
                           </a:solidFill>
                           <a:latin typeface="Calibri"/>
                         </a:rPr>
-                        <a:t>0.523 ± 0.030</a:t>
+                        <a:t>0.511 ± 0.044</a:t>
                       </a:r>
                     </a:p>
                   </a:txBody>
@@ -4015,13 +4015,13 @@
                     <a:p>
                       <a:pPr algn="r"/>
                       <a:r>
-                        <a:rPr sz="840" b="0">
+                        <a:rPr sz="800" b="0">
                           <a:solidFill>
                             <a:srgbClr val="1F2A33"/>
                           </a:solidFill>
                           <a:latin typeface="Calibri"/>
                         </a:rPr>
-                        <a:t>0.150 ± 0.007</a:t>
+                        <a:t>0.157 ± 0.018</a:t>
                       </a:r>
                     </a:p>
                   </a:txBody>
@@ -4038,13 +4038,13 @@
                     <a:p>
                       <a:pPr algn="r"/>
                       <a:r>
-                        <a:rPr sz="840" b="0">
+                        <a:rPr sz="800" b="0">
                           <a:solidFill>
                             <a:srgbClr val="1F2A33"/>
                           </a:solidFill>
                           <a:latin typeface="Calibri"/>
                         </a:rPr>
-                        <a:t>0.268 ± 0.019</a:t>
+                        <a:t>0.266 ± 0.026</a:t>
                       </a:r>
                     </a:p>
                   </a:txBody>
@@ -4055,7 +4055,7 @@
                   </a:tcPr>
                 </a:tc>
               </a:tr>
-              <a:tr h="204825">
+              <a:tr h="220980">
                 <a:tc>
                   <a:txBody>
                     <a:bodyPr lIns="54864" rIns="45720" tIns="9144" bIns="9144"/>
@@ -4063,7 +4063,7 @@
                     <a:p>
                       <a:pPr algn="l"/>
                       <a:r>
-                        <a:rPr sz="840" b="0">
+                        <a:rPr sz="800" b="0">
                           <a:solidFill>
                             <a:srgbClr val="1F2A33"/>
                           </a:solidFill>
@@ -4086,13 +4086,13 @@
                     <a:p>
                       <a:pPr algn="r"/>
                       <a:r>
-                        <a:rPr sz="840" b="0">
+                        <a:rPr sz="800" b="0">
                           <a:solidFill>
                             <a:srgbClr val="1F2A33"/>
                           </a:solidFill>
                           <a:latin typeface="Calibri"/>
                         </a:rPr>
-                        <a:t>0.337 ± 0.030</a:t>
+                        <a:t>0.383 ± 0.040</a:t>
                       </a:r>
                     </a:p>
                   </a:txBody>
@@ -4109,13 +4109,13 @@
                     <a:p>
                       <a:pPr algn="r"/>
                       <a:r>
-                        <a:rPr sz="840" b="0">
+                        <a:rPr sz="800" b="0">
                           <a:solidFill>
                             <a:srgbClr val="1F2A33"/>
                           </a:solidFill>
                           <a:latin typeface="Calibri"/>
                         </a:rPr>
-                        <a:t>0.511 ± 0.048</a:t>
+                        <a:t>0.562 ± 0.053</a:t>
                       </a:r>
                     </a:p>
                   </a:txBody>
@@ -4132,13 +4132,13 @@
                     <a:p>
                       <a:pPr algn="r"/>
                       <a:r>
-                        <a:rPr sz="840" b="0">
+                        <a:rPr sz="800" b="0">
                           <a:solidFill>
                             <a:srgbClr val="1F2A33"/>
                           </a:solidFill>
                           <a:latin typeface="Calibri"/>
                         </a:rPr>
-                        <a:t>0.179 ± 0.021</a:t>
+                        <a:t>0.207 ± 0.038</a:t>
                       </a:r>
                     </a:p>
                   </a:txBody>
@@ -4155,13 +4155,13 @@
                     <a:p>
                       <a:pPr algn="r"/>
                       <a:r>
-                        <a:rPr sz="840" b="0">
+                        <a:rPr sz="800" b="0">
                           <a:solidFill>
                             <a:srgbClr val="1F2A33"/>
                           </a:solidFill>
                           <a:latin typeface="Calibri"/>
                         </a:rPr>
-                        <a:t>0.270 ± 0.024</a:t>
+                        <a:t>0.313 ± 0.039</a:t>
                       </a:r>
                     </a:p>
                   </a:txBody>
@@ -4172,7 +4172,7 @@
                   </a:tcPr>
                 </a:tc>
               </a:tr>
-              <a:tr h="204825">
+              <a:tr h="220980">
                 <a:tc>
                   <a:txBody>
                     <a:bodyPr lIns="54864" rIns="45720" tIns="9144" bIns="9144"/>
@@ -4180,7 +4180,7 @@
                     <a:p>
                       <a:pPr algn="l"/>
                       <a:r>
-                        <a:rPr sz="840" b="0">
+                        <a:rPr sz="800" b="0">
                           <a:solidFill>
                             <a:srgbClr val="1F2A33"/>
                           </a:solidFill>
@@ -4203,13 +4203,13 @@
                     <a:p>
                       <a:pPr algn="r"/>
                       <a:r>
-                        <a:rPr sz="840" b="0">
+                        <a:rPr sz="800" b="0">
                           <a:solidFill>
                             <a:srgbClr val="1F2A33"/>
                           </a:solidFill>
                           <a:latin typeface="Calibri"/>
                         </a:rPr>
-                        <a:t>0.301 ± 0.017</a:t>
+                        <a:t>0.442 ± 0.012</a:t>
                       </a:r>
                     </a:p>
                   </a:txBody>
@@ -4226,13 +4226,13 @@
                     <a:p>
                       <a:pPr algn="r"/>
                       <a:r>
-                        <a:rPr sz="840" b="0">
+                        <a:rPr sz="800" b="0">
                           <a:solidFill>
                             <a:srgbClr val="1F2A33"/>
                           </a:solidFill>
                           <a:latin typeface="Calibri"/>
                         </a:rPr>
-                        <a:t>0.482 ± 0.034</a:t>
+                        <a:t>0.652 ± 0.024</a:t>
                       </a:r>
                     </a:p>
                   </a:txBody>
@@ -4249,13 +4249,13 @@
                     <a:p>
                       <a:pPr algn="r"/>
                       <a:r>
-                        <a:rPr sz="840" b="0">
+                        <a:rPr sz="800" b="0">
                           <a:solidFill>
                             <a:srgbClr val="1F2A33"/>
                           </a:solidFill>
                           <a:latin typeface="Calibri"/>
                         </a:rPr>
-                        <a:t>0.129 ± 0.010</a:t>
+                        <a:t>0.221 ± 0.008</a:t>
                       </a:r>
                     </a:p>
                   </a:txBody>
@@ -4272,13 +4272,13 @@
                     <a:p>
                       <a:pPr algn="r"/>
                       <a:r>
-                        <a:rPr sz="840" b="0">
+                        <a:rPr sz="800" b="0">
                           <a:solidFill>
                             <a:srgbClr val="1F2A33"/>
                           </a:solidFill>
                           <a:latin typeface="Calibri"/>
                         </a:rPr>
-                        <a:t>0.240 ± 0.013</a:t>
+                        <a:t>0.368 ± 0.010</a:t>
                       </a:r>
                     </a:p>
                   </a:txBody>
@@ -4289,7 +4289,7 @@
                   </a:tcPr>
                 </a:tc>
               </a:tr>
-              <a:tr h="204828">
+              <a:tr h="220980">
                 <a:tc>
                   <a:txBody>
                     <a:bodyPr lIns="54864" rIns="45720" tIns="9144" bIns="9144"/>
@@ -4297,13 +4297,13 @@
                     <a:p>
                       <a:pPr algn="l"/>
                       <a:r>
-                        <a:rPr sz="840" b="0">
+                        <a:rPr sz="800" b="0">
                           <a:solidFill>
                             <a:srgbClr val="1F2A33"/>
                           </a:solidFill>
                           <a:latin typeface="Calibri"/>
                         </a:rPr>
-                        <a:t>hybrid + rerank</a:t>
+                        <a:t>lexical (BM25)</a:t>
                       </a:r>
                     </a:p>
                   </a:txBody>
@@ -4320,13 +4320,13 @@
                     <a:p>
                       <a:pPr algn="r"/>
                       <a:r>
-                        <a:rPr sz="840" b="0">
+                        <a:rPr sz="800" b="0">
                           <a:solidFill>
                             <a:srgbClr val="1F2A33"/>
                           </a:solidFill>
                           <a:latin typeface="Calibri"/>
                         </a:rPr>
-                        <a:t>0.117</a:t>
+                        <a:t>0.426</a:t>
                       </a:r>
                     </a:p>
                   </a:txBody>
@@ -4343,13 +4343,13 @@
                     <a:p>
                       <a:pPr algn="r"/>
                       <a:r>
-                        <a:rPr sz="840" b="0">
+                        <a:rPr sz="800" b="0">
                           <a:solidFill>
                             <a:srgbClr val="1F2A33"/>
                           </a:solidFill>
                           <a:latin typeface="Calibri"/>
                         </a:rPr>
-                        <a:t>0.157</a:t>
+                        <a:t>0.571</a:t>
                       </a:r>
                     </a:p>
                   </a:txBody>
@@ -4366,13 +4366,13 @@
                     <a:p>
                       <a:pPr algn="r"/>
                       <a:r>
-                        <a:rPr sz="840" b="0">
+                        <a:rPr sz="800" b="0">
                           <a:solidFill>
                             <a:srgbClr val="1F2A33"/>
                           </a:solidFill>
                           <a:latin typeface="Calibri"/>
                         </a:rPr>
-                        <a:t>0.086</a:t>
+                        <a:t>0.271</a:t>
                       </a:r>
                     </a:p>
                   </a:txBody>
@@ -4389,7 +4389,124 @@
                     <a:p>
                       <a:pPr algn="r"/>
                       <a:r>
-                        <a:rPr sz="840" b="0">
+                        <a:rPr sz="800" b="0">
+                          <a:solidFill>
+                            <a:srgbClr val="1F2A33"/>
+                          </a:solidFill>
+                          <a:latin typeface="Calibri"/>
+                        </a:rPr>
+                        <a:t>0.355</a:t>
+                      </a:r>
+                    </a:p>
+                  </a:txBody>
+                  <a:tcPr anchor="ctr">
+                    <a:solidFill>
+                      <a:srgbClr val="EAF2F7"/>
+                    </a:solidFill>
+                  </a:tcPr>
+                </a:tc>
+              </a:tr>
+              <a:tr h="220980">
+                <a:tc>
+                  <a:txBody>
+                    <a:bodyPr lIns="54864" rIns="45720" tIns="9144" bIns="9144"/>
+                    <a:lstStyle/>
+                    <a:p>
+                      <a:pPr algn="l"/>
+                      <a:r>
+                        <a:rPr sz="800" b="0">
+                          <a:solidFill>
+                            <a:srgbClr val="1F2A33"/>
+                          </a:solidFill>
+                          <a:latin typeface="Calibri"/>
+                        </a:rPr>
+                        <a:t>hybrid + rerank</a:t>
+                      </a:r>
+                    </a:p>
+                  </a:txBody>
+                  <a:tcPr anchor="ctr">
+                    <a:solidFill>
+                      <a:srgbClr val="FFFFFF"/>
+                    </a:solidFill>
+                  </a:tcPr>
+                </a:tc>
+                <a:tc>
+                  <a:txBody>
+                    <a:bodyPr lIns="54864" rIns="45720" tIns="9144" bIns="9144"/>
+                    <a:lstStyle/>
+                    <a:p>
+                      <a:pPr algn="r"/>
+                      <a:r>
+                        <a:rPr sz="800" b="0">
+                          <a:solidFill>
+                            <a:srgbClr val="1F2A33"/>
+                          </a:solidFill>
+                          <a:latin typeface="Calibri"/>
+                        </a:rPr>
+                        <a:t>0.117</a:t>
+                      </a:r>
+                    </a:p>
+                  </a:txBody>
+                  <a:tcPr anchor="ctr">
+                    <a:solidFill>
+                      <a:srgbClr val="FFFFFF"/>
+                    </a:solidFill>
+                  </a:tcPr>
+                </a:tc>
+                <a:tc>
+                  <a:txBody>
+                    <a:bodyPr lIns="54864" rIns="45720" tIns="9144" bIns="9144"/>
+                    <a:lstStyle/>
+                    <a:p>
+                      <a:pPr algn="r"/>
+                      <a:r>
+                        <a:rPr sz="800" b="0">
+                          <a:solidFill>
+                            <a:srgbClr val="1F2A33"/>
+                          </a:solidFill>
+                          <a:latin typeface="Calibri"/>
+                        </a:rPr>
+                        <a:t>0.157</a:t>
+                      </a:r>
+                    </a:p>
+                  </a:txBody>
+                  <a:tcPr anchor="ctr">
+                    <a:solidFill>
+                      <a:srgbClr val="FFFFFF"/>
+                    </a:solidFill>
+                  </a:tcPr>
+                </a:tc>
+                <a:tc>
+                  <a:txBody>
+                    <a:bodyPr lIns="54864" rIns="45720" tIns="9144" bIns="9144"/>
+                    <a:lstStyle/>
+                    <a:p>
+                      <a:pPr algn="r"/>
+                      <a:r>
+                        <a:rPr sz="800" b="0">
+                          <a:solidFill>
+                            <a:srgbClr val="1F2A33"/>
+                          </a:solidFill>
+                          <a:latin typeface="Calibri"/>
+                        </a:rPr>
+                        <a:t>0.086</a:t>
+                      </a:r>
+                    </a:p>
+                  </a:txBody>
+                  <a:tcPr anchor="ctr">
+                    <a:solidFill>
+                      <a:srgbClr val="FFFFFF"/>
+                    </a:solidFill>
+                  </a:tcPr>
+                </a:tc>
+                <a:tc>
+                  <a:txBody>
+                    <a:bodyPr lIns="54864" rIns="45720" tIns="9144" bIns="9144"/>
+                    <a:lstStyle/>
+                    <a:p>
+                      <a:pPr algn="r"/>
+                      <a:r>
+                        <a:rPr sz="800" b="0">
                           <a:solidFill>
                             <a:srgbClr val="1F2A33"/>
                           </a:solidFill>
@@ -4401,7 +4518,7 @@
                   </a:txBody>
                   <a:tcPr anchor="ctr">
                     <a:solidFill>
-                      <a:srgbClr val="EAF2F7"/>
+                      <a:srgbClr val="FFFFFF"/>
                     </a:solidFill>
                   </a:tcPr>
                 </a:tc>
@@ -4418,8 +4535,8 @@
         </p:nvSpPr>
         <p:spPr>
           <a:xfrm>
-            <a:off x="457200" y="6931152"/>
-            <a:ext cx="6647688" cy="1353312"/>
+            <a:off x="457200" y="7205472"/>
+            <a:ext cx="6647688" cy="1143000"/>
           </a:xfrm>
           <a:prstGeom prst="roundRect">
             <a:avLst>
@@ -4459,15 +4576,15 @@
               </a:lnSpc>
             </a:pPr>
             <a:r>
-              <a:rPr sz="850">
+              <a:rPr sz="830">
                 <a:solidFill>
                   <a:srgbClr val="1F2A33"/>
                 </a:solidFill>
                 <a:latin typeface="Calibri"/>
               </a:rPr>
-              <a:t>Paired test (v2): Δ nDCG@10 = +0.037, bootstrap 95% CI [-0.015; +0.086], p = 0.154 → NOT significant; default unchanged, ADR 0009 proposed.
-Independent v3 hold-out (71 code queries, 3 runs): vector 0.205 ± 0.014 vs hybrid 0.183 ± 0.005 nDCG@10; Δ +0.023, CI [-0.019; +0.061], p = 0.275 → also NOT significant.
-Router on v3: 58/100; the main gap is lexical→hybrid. Lexical anchors: 10/10 in top-3. Cross-encoder stays optional (0.117).</a:t>
+              <a:t>Paired test (v2, 4 runs): hybrid 0.442 vs vector 0.331; Δ = −0.112, 95% CI [−0.184; −0.038], p = 0.0037 → hybrid significantly better; default hybrid confirmed.
+Independent v3 hold-out (71 code queries, 3 runs): hybrid 0.217 vs vector 0.208; Δ = −0.010, p = 0.635 → not worse. ADR 0009 (leader shift) rejected; fix in ADR 0010.
+Router v3: 58/100; main gap lexical→hybrid. Anchors: 10/10 top-3.</a:t>
             </a:r>
           </a:p>
         </p:txBody>
@@ -4591,7 +4708,7 @@
                 </a:solidFill>
                 <a:latin typeface="Calibri"/>
               </a:rPr>
-              <a:t>•  72 unit tests; ruff clean, mypy over 22 modules, cyclomatic-complexity gate 143 blocks / avg 4.37 (A) in CI; Python 3.11/3.12; CI green at 64a0085 (cleaned history).</a:t>
+              <a:t>•  74 unit tests; ruff clean, mypy over 22 modules, cyclomatic-complexity gate 143 blocks / avg 4.37 (A) in CI; Python 3.11/3.12; CI green.</a:t>
             </a:r>
           </a:p>
           <a:p>
